--- a/docs/business/final_deck/PublicLogic - Capabilities & Positioning (2026-06).pptx
+++ b/docs/business/final_deck/PublicLogic - Capabilities & Positioning (2026-06).pptx
@@ -5303,7 +5303,7 @@
                 </a:solidFill>
                 <a:latin typeface="Helvetica Neue"/>
               </a:rPr>
-              <a:t>PublicLogic helps communities and mission-driven organizations move important projects from planning to implementation. We do this through Institutional Stewardship — preserving, governing, transferring, and operationalizing the knowledge required for long-term success.</a:t>
+              <a:t>PublicLogic helps communities, public-sector organizations, and community-serving institutions move important projects from planning to implementation. We do this through Institutional Stewardship — preserving, governing, transferring, and operationalizing the knowledge required for long-term success.</a:t>
             </a:r>
           </a:p>
         </p:txBody>
